--- a/ai-beginner-bootcamp-outline/day_4/Day_4_Slides.pptx
+++ b/ai-beginner-bootcamp-outline/day_4/Day_4_Slides.pptx
@@ -510,7 +510,7 @@
           <a:lstStyle/>
           <a:p>
             <a:r>
-              <a:t>Welcome back! Give yourselves a hand — you've made it to Day 4. Let me start with a story. An intern joins your office. They type at 200 words per minute, they've read half the internet, they never get tired, and they never say 'I don't know.' That last part is the problem. That intern is your AI. Today is not about typing better prompts. Today is about becoming the person who catches mistakes before your boss, your client, or the public does. This is the day that separates people who *play* with AI from people who can safely *deploy* it at work. Encourage them: this is the most career-protecting session of the week.</a:t>
+              <a:t>Open warmly. Say: 'Days 1 to 3 were about power — getting your Second Brain to capture and recall information fast. Today is about responsibility. A brilliant assistant who occasionally makes things up with total confidence is dangerous, not helpful.' Reassure them: this is not a technical day about code, it's about judgement and simple habits. Ask the room: 'Has anyone here already caught the AI giving you a wrong answer this week?' Let two or three people share — those stories become the fuel for the whole session.</a:t>
             </a:r>
           </a:p>
         </p:txBody>
@@ -580,7 +580,7 @@
           <a:lstStyle/>
           <a:p>
             <a:r>
-              <a:t>Let's demystify this. The AI is not lying to you — lying requires knowing the truth. The AI is completing a pattern. If your sentence looks like it should end with a statistic, it will produce something that looks exactly like a statistic. Real examples to mention: lawyers abroad have been sanctioned for filing court documents with AI-invented cases. Ask the room: 'Who here has caught the AI making something up?' Let two or three people share — this builds the room's collective radar. Key line to land: 'The AI is not wrong loudly. It is wrong beautifully. That's what makes it dangerous.'</a:t>
+              <a:t>Normalise the failures — do not scare people. Say: 'These are not bugs you broke. They are the known behaviour of every AI system on earth, including the expensive ones.' Explain hallucination simply: the model is a very talented pattern-completer, so when it doesn't know, it completes the pattern anyway — that's why fake statistics and fake references appear. Give a Nigerian-flavoured example: asking for the current price of a service, or a CAC regulation, and getting a plausible but outdated answer. Emphasise the last bullet: 'If your Second Brain is full of half-finished notes, no amount of clever prompting will save you.'</a:t>
             </a:r>
           </a:p>
         </p:txBody>
@@ -650,7 +650,7 @@
           <a:lstStyle/>
           <a:p>
             <a:r>
-              <a:t>Give them a mental checklist they can carry forever. Walk through each with a quick example. FACTUAL: 'The 2023 Data Protection Act says...' — did it? Check. CONTEXT: an HR policy that references 'at-will employment' — that's American, Nigerian labour law is different. TONE: words like 'delve', 'tapestry', 'in today's fast-paced world', 'it's not just X, it's Y' — these are AI fingerprints. OMISSION is the one people miss: ask the AI for a business proposal and it will happily leave out the risks section, because you didn't ask. Tell them: 'Omission errors don't look like errors. They look like a clean document.' Have them write these 4 words down: FACTUAL, CONTEXT, TONE, OMISSION.</a:t>
+              <a:t>This is the mindset shift of the day. Many people either trust AI blindly or refuse to use it at all — both are wasteful. Introduce the Trust Ladder as a way to spend your attention where it matters. Walk through a concrete example: 'Using AI to brainstorm twenty content ideas — rung 1, who cares if five are bad. Using AI to quote a tax figure to a client — rung 3, you verify at the source, full stop.' Invite participants to name one task from their own work at each rung. Land the line: 'Speed is for rung one. Care is for rung three. Confusing the two is how people get embarrassed.'</a:t>
             </a:r>
           </a:p>
         </p:txBody>
@@ -720,7 +720,7 @@
           <a:lstStyle/>
           <a:p>
             <a:r>
-              <a:t>Here's the shift in thinking: most people try to *catch* errors after. Professionals *prevent* them before. That's a guardrail — same as the barrier on a highway bend. Demo live if you can: run the same prompt twice, once naked and once with guardrails, and let them see the difference. The single most powerful line to teach today is the honesty guardrail — '[NEEDS VERIFICATION]'. It converts a hallucination into a to-do list item. Tell them: 'You are not restricting the AI. You are giving it permission to be honest.' Have everyone add one guardrail to a prompt they already use, right now, in 60 seconds.</a:t>
+              <a:t>Explain grounding in plain language: 'You are telling the assistant to stop being a know-it-all and start being a researcher who cites the file.' Demonstrate live if possible — ask a question with grounding instructions, then ask the same question without them, and show the difference in the output. Highlight the permission to say 'I don't know': models are eager to please, so you must explicitly give them an exit. Tell them: 'When you demand a quote, you get one of two good outcomes — either a verified answer, or a visible gap in your knowledge base that you now know to fill.'</a:t>
             </a:r>
           </a:p>
         </p:txBody>
@@ -790,7 +790,7 @@
           <a:lstStyle/>
           <a:p>
             <a:r>
-              <a:t>This is the centrepiece of the day — a 90-second checklist that goes between the AI and the outside world. Walk through each letter slowly and give one workplace example per letter. Emphasise 'S — Safe': ask them 'if this document appeared in a newspaper or a court, would I be comfortable?' Tell them the honest truth: this takes about 2 minutes on a one-page document. Two minutes to protect your name. Encourage: 'You already do this instinctively for your own writing. We're just naming it so you do it consistently.' Ask them to save T.R.U.S.T. as a note on their phone before they leave.</a:t>
+              <a:t>Frame this as the cheapest quality upgrade available. Say: 'In a good newsroom, the writer is never the only editor. You can build the same discipline into your Second Brain for free.' Show the Critic prompt on screen and let participants copy it. Explain why a fresh conversation matters: within the same thread the model is biased toward defending what it already said. Encourage them to save the Critic prompt as a reusable snippet — this is the beginning of a personal QA toolkit. Optional exercise: participants run yesterday's best output through a Critic pass and share what it caught.</a:t>
             </a:r>
           </a:p>
         </p:txBody>
@@ -860,7 +860,7 @@
           <a:lstStyle/>
           <a:p>
             <a:r>
-              <a:t>Great news — you don't have to do all the checking alone. The AI is often a much better critic than it is a creator. Explain why the *new chat* trick works: in the same conversation, the AI is biased toward agreeing with itself and pleasing you. A fresh chat has no ego in the game. Demo the Red Team prompt live if possible — audiences always react when the AI tears apart the document it just wrote. Caution them clearly: AI self-checking is a *filter*, not a *guarantee*. It narrows what you must verify manually; it does not replace you. Line to land: 'Two AI passes plus one human pass beats ten AI passes.'</a:t>
+              <a:t>Bring it back to what they built on Days 2 and 3. Say: 'Everything we've discussed so far is downstream. The real fix is upstream.' Explain the simple tagging habit — thirty seconds at capture time saves an hour of doubt later. Spend real time on the privacy bullet: give practical guidance on what should never be pasted into a public chatbot — client contracts, BVN or NIN numbers, staff salary records, unreleased financials. Suggest a redaction habit: replace names with Client A, Client B. Close with: 'Your Second Brain will only ever be as honest as the things you feed it.'</a:t>
             </a:r>
           </a:p>
         </p:txBody>
@@ -930,7 +930,7 @@
           <a:lstStyle/>
           <a:p>
             <a:r>
-              <a:t>This slide is the seatbelt of the whole week. Be firm but not frightening. Explain simply that most consumer AI tools may use your inputs for training — so treat every chat box like a public noticeboard. Teach the anonymisation habit: replace real names with 'Client A', real figures with placeholders, then swap them back in your own document. Mention Nigeria's NDPA and organisational policy — many workplaces are writing AI rules right now, so encourage them to ask their IT or compliance team. End with the accountability principle: 'When it goes wrong, nobody will ask what the AI did. They will ask what YOU approved.'</a:t>
+              <a:t>This is the takeaway artefact of the day — tell them to screenshot it or write it down now. Walk through it once at speed, then apply it live to a real piece of work from a volunteer in the room. Emphasise question six as the human backstop: 'The AI does not carry your reputation. You do. That is why the last check will always be a person.' Reassure them this takes about ninety seconds once it becomes a habit, and it is the difference between an amateur and a professional operator.</a:t>
             </a:r>
           </a:p>
         </p:txBody>
@@ -1000,7 +1000,7 @@
           <a:lstStyle/>
           <a:p>
             <a:r>
-              <a:t>Close with energy. Set the task clearly and keep it small — one document, ten minutes. The magic is in step two: turning every mistake they catch into a permanent guardrail, so their prompts get smarter every week. Invite two people to share the worst error they catch — normalising error-hunting builds a healthy culture. Reassure anyone feeling nervous: 'Today wasn't meant to scare you off AI. It was meant to make you the one person in your office who can be trusted with it.' Tease Day 5: tomorrow we combine everything into a workflow you can use Monday morning, and you leave with proof of what you can do. Well done today.</a:t>
+              <a:t>End on energy and action. Set the exercise clearly and give a real timebox; walk the room while they work. The 'deliberately break it' task is the most valuable — celebrate anyone whose system correctly said 'I don't know', and help anyone whose system confidently invented an answer to add stronger grounding instructions. Close the day with the key message: 'Guardrails do not slow you down — they are what allow you to move fast without fear. Now that you can trust your Second Brain, tomorrow we make it run on autopilot.' Thank them and remind them to bring their Prompt Library to Day 5.</a:t>
             </a:r>
           </a:p>
         </p:txBody>
@@ -4151,7 +4151,7 @@
               </a:defRPr>
             </a:pPr>
             <a:r>
-              <a:t>Yesterday you learned to make AI *do* the work — today you learn to make it *trustworthy*</a:t>
+              <a:t>Welcome back — you've already built a Second Brain that captures, organises and retrieves your knowledge</a:t>
             </a:r>
           </a:p>
           <a:p>
@@ -4164,7 +4164,7 @@
               </a:defRPr>
             </a:pPr>
             <a:r>
-              <a:t>The difference between an amateur and a professional is not speed, it's reliability</a:t>
+              <a:t>Today we answer the big question: 'Can I actually trust what it tells me?'</a:t>
             </a:r>
           </a:p>
           <a:p>
@@ -4177,7 +4177,7 @@
               </a:defRPr>
             </a:pPr>
             <a:r>
-              <a:t>By the end of today: you will never send out an AI-generated document you're unsure about</a:t>
+              <a:t>Trust is not a feeling — it's a system you design on purpose</a:t>
             </a:r>
           </a:p>
           <a:p>
@@ -4190,7 +4190,7 @@
               </a:defRPr>
             </a:pPr>
             <a:r>
-              <a:t>Big idea: You are the Editor-in-Chief. The AI is your very fast, very confident intern.</a:t>
+              <a:t>By the end of today you'll have a personal QA checklist your AI must pass before you act on anything</a:t>
             </a:r>
           </a:p>
         </p:txBody>
@@ -4245,7 +4245,7 @@
               </a:defRPr>
             </a:pPr>
             <a:r>
-              <a:t>Why AI Confidently Gets Things Wrong</a:t>
+              <a:t>Why Smart Systems Still Get It Wrong</a:t>
             </a:r>
           </a:p>
         </p:txBody>
@@ -4275,7 +4275,7 @@
               </a:defRPr>
             </a:pPr>
             <a:r>
-              <a:t>AI predicts what *sounds right*, not what *is right* — it is a pattern machine, not a truth machine</a:t>
+              <a:t>Hallucination: the AI invents a fact, a citation or a link that simply does not exist</a:t>
             </a:r>
           </a:p>
           <a:p>
@@ -4288,7 +4288,7 @@
               </a:defRPr>
             </a:pPr>
             <a:r>
-              <a:t>'Hallucination' = the AI inventing facts, names, laws, statistics or citations that don't exist</a:t>
+              <a:t>Stale knowledge: it answers from an old document you forgot to update</a:t>
             </a:r>
           </a:p>
           <a:p>
@@ -4301,7 +4301,7 @@
               </a:defRPr>
             </a:pPr>
             <a:r>
-              <a:t>It never says 'I'm not sure' unless you ask it to — confidence is its default setting</a:t>
+              <a:t>Wrong retrieval: it grabs the right-looking note but the wrong context</a:t>
             </a:r>
           </a:p>
           <a:p>
@@ -4314,7 +4314,20 @@
               </a:defRPr>
             </a:pPr>
             <a:r>
-              <a:t>Common Nigerian workplace traps: outdated CBN circulars, invented case law, wrong NGN figures, fake research citations</a:t>
+              <a:t>Confident tone: the AI never says 'I'm 60% sure' — it always sounds certain</a:t>
+            </a:r>
+          </a:p>
+          <a:p>
+            <a:pPr>
+              <a:defRPr sz="2400">
+                <a:solidFill>
+                  <a:srgbClr val="FFFFFF"/>
+                </a:solidFill>
+                <a:latin typeface="Arial"/>
+              </a:defRPr>
+            </a:pPr>
+            <a:r>
+              <a:t>Garbage in, garbage out: messy notes produce messy answers</a:t>
             </a:r>
           </a:p>
         </p:txBody>
@@ -4369,7 +4382,7 @@
               </a:defRPr>
             </a:pPr>
             <a:r>
-              <a:t>The 4 Failure Types You Must Learn to Spot</a:t>
+              <a:t>The Trust Ladder: Not Every Task Needs the Same Rigour</a:t>
             </a:r>
           </a:p>
         </p:txBody>
@@ -4399,7 +4412,7 @@
               </a:defRPr>
             </a:pPr>
             <a:r>
-              <a:t>FACTUAL: invented numbers, dates, names, laws, sources — anything you could Google</a:t>
+              <a:t>Rung 1 — Low stakes: brainstorming, first drafts, summarising your own notes. Move fast, verify lightly</a:t>
             </a:r>
           </a:p>
           <a:p>
@@ -4412,7 +4425,7 @@
               </a:defRPr>
             </a:pPr>
             <a:r>
-              <a:t>CONTEXT: technically correct, but wrong for Nigeria, wrong for your industry, wrong for your audience</a:t>
+              <a:t>Rung 2 — Medium stakes: client emails, internal reports, social posts. One human read-through required</a:t>
             </a:r>
           </a:p>
           <a:p>
@@ -4425,7 +4438,7 @@
               </a:defRPr>
             </a:pPr>
             <a:r>
-              <a:t>TONE: too American, too formal, too casual, or 'obviously written by ChatGPT'</a:t>
+              <a:t>Rung 3 — High stakes: money, legal, medical, public claims, anything with your name on it. Verify every single fact at source</a:t>
             </a:r>
           </a:p>
           <a:p>
@@ -4438,7 +4451,20 @@
               </a:defRPr>
             </a:pPr>
             <a:r>
-              <a:t>OMISSION: the most dangerous — what the AI quietly *left out* (risks, exceptions, disclaimers)</a:t>
+              <a:t>Ask before every task: 'What happens if this is wrong?'</a:t>
+            </a:r>
+          </a:p>
+          <a:p>
+            <a:pPr>
+              <a:defRPr sz="2400">
+                <a:solidFill>
+                  <a:srgbClr val="FFFFFF"/>
+                </a:solidFill>
+                <a:latin typeface="Arial"/>
+              </a:defRPr>
+            </a:pPr>
+            <a:r>
+              <a:t>Match your checking effort to the cost of being wrong</a:t>
             </a:r>
           </a:p>
         </p:txBody>
@@ -4493,7 +4519,7 @@
               </a:defRPr>
             </a:pPr>
             <a:r>
-              <a:t>Guardrails: Building the Fence Before You Need It</a:t>
+              <a:t>Guardrail #1: Ground the Answer in Your Own Sources</a:t>
             </a:r>
           </a:p>
         </p:txBody>
@@ -4523,7 +4549,7 @@
               </a:defRPr>
             </a:pPr>
             <a:r>
-              <a:t>A guardrail is a rule you give the AI *in advance* to stop predictable mistakes</a:t>
+              <a:t>Instruct the AI: 'Answer ONLY using the documents I provided'</a:t>
             </a:r>
           </a:p>
           <a:p>
@@ -4536,7 +4562,7 @@
               </a:defRPr>
             </a:pPr>
             <a:r>
-              <a:t>Boundary: 'Only use the document I pasted. Do not add outside information.'</a:t>
+              <a:t>Add: 'If the answer is not in the sources, say I don't know'</a:t>
             </a:r>
           </a:p>
           <a:p>
@@ -4549,7 +4575,7 @@
               </a:defRPr>
             </a:pPr>
             <a:r>
-              <a:t>Honesty: 'If you are unsure or lack data, write [NEEDS VERIFICATION] instead of guessing.'</a:t>
+              <a:t>Demand receipts: 'Quote the exact line and name the file you used'</a:t>
             </a:r>
           </a:p>
           <a:p>
@@ -4562,7 +4588,7 @@
               </a:defRPr>
             </a:pPr>
             <a:r>
-              <a:t>Format: 'Maximum 200 words. Nigerian English. No bullet points. No em-dashes.'</a:t>
+              <a:t>No quote, no trust — an unsourced claim is just a rumour</a:t>
             </a:r>
           </a:p>
           <a:p>
@@ -4575,7 +4601,7 @@
               </a:defRPr>
             </a:pPr>
             <a:r>
-              <a:t>Role: 'You are a cautious compliance officer, not a marketer.'</a:t>
+              <a:t>This one habit removes the majority of hallucinations in a Second Brain</a:t>
             </a:r>
           </a:p>
         </p:txBody>
@@ -4630,7 +4656,7 @@
               </a:defRPr>
             </a:pPr>
             <a:r>
-              <a:t>The T.R.U.S.T. Review Framework</a:t>
+              <a:t>Guardrail #2: The Second Pair of Eyes</a:t>
             </a:r>
           </a:p>
         </p:txBody>
@@ -4660,7 +4686,7 @@
               </a:defRPr>
             </a:pPr>
             <a:r>
-              <a:t>T — Trace: Can I find the source for every fact, number and name?</a:t>
+              <a:t>Run a Critic pass: 'Review this answer. List every claim that is unsupported or risky'</a:t>
             </a:r>
           </a:p>
           <a:p>
@@ -4673,7 +4699,7 @@
               </a:defRPr>
             </a:pPr>
             <a:r>
-              <a:t>R — Relevant: Is this right for MY country, MY industry, MY reader?</a:t>
+              <a:t>Ask for a confidence rating on each key claim, with reasons</a:t>
             </a:r>
           </a:p>
           <a:p>
@@ -4686,7 +4712,7 @@
               </a:defRPr>
             </a:pPr>
             <a:r>
-              <a:t>U — Understandable: Would a busy colleague get this on one read?</a:t>
+              <a:t>Force alternatives: 'What is a different interpretation of this data?'</a:t>
             </a:r>
           </a:p>
           <a:p>
@@ -4699,7 +4725,7 @@
               </a:defRPr>
             </a:pPr>
             <a:r>
-              <a:t>S — Safe: Any legal, financial, privacy or reputational risk if this goes public?</a:t>
+              <a:t>Separate the roles — one prompt to create, a fresh prompt to challenge</a:t>
             </a:r>
           </a:p>
           <a:p>
@@ -4712,7 +4738,7 @@
               </a:defRPr>
             </a:pPr>
             <a:r>
-              <a:t>T — Tone: Does this sound like me and my organisation — or like a robot?</a:t>
+              <a:t>Never let the same output grade its own homework in the same breath</a:t>
             </a:r>
           </a:p>
         </p:txBody>
@@ -4767,7 +4793,7 @@
               </a:defRPr>
             </a:pPr>
             <a:r>
-              <a:t>Make the AI Check Its Own Work</a:t>
+              <a:t>Guardrail #3: Guard the Input, Not Just the Output</a:t>
             </a:r>
           </a:p>
         </p:txBody>
@@ -4797,7 +4823,7 @@
               </a:defRPr>
             </a:pPr>
             <a:r>
-              <a:t>The Critic Pass: 'Review the draft above. List every claim that needs verification.'</a:t>
+              <a:t>Quality control starts at capture — date-stamp and label every note with its source</a:t>
             </a:r>
           </a:p>
           <a:p>
@@ -4810,7 +4836,7 @@
               </a:defRPr>
             </a:pPr>
             <a:r>
-              <a:t>The Red Team: 'You are a hostile reviewer. Find 5 weaknesses in this document.'</a:t>
+              <a:t>Mark each item: Verified fact / My opinion / Unconfirmed / Needs update</a:t>
             </a:r>
           </a:p>
           <a:p>
@@ -4823,7 +4849,7 @@
               </a:defRPr>
             </a:pPr>
             <a:r>
-              <a:t>The Fresh-Eyes Test: paste output into a NEW chat and ask 'What's wrong with this?'</a:t>
+              <a:t>Archive or delete outdated documents — old files are silent liars</a:t>
             </a:r>
           </a:p>
           <a:p>
@@ -4836,7 +4862,7 @@
               </a:defRPr>
             </a:pPr>
             <a:r>
-              <a:t>The Confidence Score: 'Rate each section High/Medium/Low confidence and explain why.'</a:t>
+              <a:t>Never paste confidential client data, passwords, or personal ID numbers into a public tool</a:t>
             </a:r>
           </a:p>
           <a:p>
@@ -4849,7 +4875,7 @@
               </a:defRPr>
             </a:pPr>
             <a:r>
-              <a:t>Rule: never let the AI grade itself in the same conversation where it was praised</a:t>
+              <a:t>A tidy Second Brain is a trustworthy Second Brain</a:t>
             </a:r>
           </a:p>
         </p:txBody>
@@ -4904,7 +4930,7 @@
               </a:defRPr>
             </a:pPr>
             <a:r>
-              <a:t>Know What You Must NEVER Delegate</a:t>
+              <a:t>Your Personal QA Checklist</a:t>
             </a:r>
           </a:p>
         </p:txBody>
@@ -4934,7 +4960,7 @@
               </a:defRPr>
             </a:pPr>
             <a:r>
-              <a:t>Never paste: customer data, staff records, salaries, medical info, unreleased financials, passwords</a:t>
+              <a:t>1. What rung of the Trust Ladder is this task on?</a:t>
             </a:r>
           </a:p>
           <a:p>
@@ -4947,7 +4973,7 @@
               </a:defRPr>
             </a:pPr>
             <a:r>
-              <a:t>Never auto-send: legal advice, medical guidance, financial commitments, HR disciplinary letters</a:t>
+              <a:t>2. Did I ground the request in my own sources?</a:t>
             </a:r>
           </a:p>
           <a:p>
@@ -4960,7 +4986,7 @@
               </a:defRPr>
             </a:pPr>
             <a:r>
-              <a:t>Never claim: AI output as verified research without checking every source yourself</a:t>
+              <a:t>3. Can I see a quote and a filename for every key claim?</a:t>
             </a:r>
           </a:p>
           <a:p>
@@ -4973,7 +4999,7 @@
               </a:defRPr>
             </a:pPr>
             <a:r>
-              <a:t>Always keep: a human signature and a human name on anything that leaves the building</a:t>
+              <a:t>4. Did I run a Critic pass on anything above rung one?</a:t>
             </a:r>
           </a:p>
           <a:p>
@@ -4986,7 +5012,20 @@
               </a:defRPr>
             </a:pPr>
             <a:r>
-              <a:t>Ask before you paste: 'Would I be comfortable if this appeared on a public website?'</a:t>
+              <a:t>5. Have I checked dates, numbers, names and links at the source?</a:t>
+            </a:r>
+          </a:p>
+          <a:p>
+            <a:pPr>
+              <a:defRPr sz="2400">
+                <a:solidFill>
+                  <a:srgbClr val="FFFFFF"/>
+                </a:solidFill>
+                <a:latin typeface="Arial"/>
+              </a:defRPr>
+            </a:pPr>
+            <a:r>
+              <a:t>6. Am I comfortable putting my name on this? If not, it's not finished</a:t>
             </a:r>
           </a:p>
         </p:txBody>
@@ -5041,7 +5080,7 @@
               </a:defRPr>
             </a:pPr>
             <a:r>
-              <a:t>Your Practice Task &amp; Tomorrow</a:t>
+              <a:t>Practice Now &amp; Look Ahead to Day 5</a:t>
             </a:r>
           </a:p>
         </p:txBody>
@@ -5071,7 +5110,7 @@
               </a:defRPr>
             </a:pPr>
             <a:r>
-              <a:t>Task: take yesterday's output, run it through T.R.U.S.T., and list every fix you made</a:t>
+              <a:t>Exercise (20 mins): take one real output from Day 3 and run the full checklist on it</a:t>
             </a:r>
           </a:p>
           <a:p>
@@ -5084,7 +5123,7 @@
               </a:defRPr>
             </a:pPr>
             <a:r>
-              <a:t>Then rewrite the original prompt with 2 guardrails so those errors never happen again</a:t>
+              <a:t>Deliberately break it — ask your Second Brain a question it cannot answer, and see if it admits it</a:t>
             </a:r>
           </a:p>
           <a:p>
@@ -5097,7 +5136,7 @@
               </a:defRPr>
             </a:pPr>
             <a:r>
-              <a:t>Reflect: which failure type do YOU personally miss most — Factual, Context, Tone or Omission?</a:t>
+              <a:t>Fix one weak spot in your notes: add a source, a date, or a status tag</a:t>
             </a:r>
           </a:p>
           <a:p>
@@ -5110,7 +5149,7 @@
               </a:defRPr>
             </a:pPr>
             <a:r>
-              <a:t>Tomorrow (Day 5): putting it all together — building your personal AI workflow and portfolio</a:t>
+              <a:t>Save your Grounding prompt and your Critic prompt into a reusable Prompt Library</a:t>
             </a:r>
           </a:p>
           <a:p>
@@ -5123,7 +5162,7 @@
               </a:defRPr>
             </a:pPr>
             <a:r>
-              <a:t>Remember: your judgement is the product. The AI is just the printer.</a:t>
+              <a:t>Tomorrow on Day 5: putting it all together — your automated, reliable Second Brain workflow</a:t>
             </a:r>
           </a:p>
         </p:txBody>
